--- a/results/figures_tables/combine/beautify.pptx
+++ b/results/figures_tables/combine/beautify.pptx
@@ -198,7 +198,7 @@
           <a:p>
             <a:fld id="{8FE5EFEB-AEDE-FC4C-BD98-BCAAA9CB9605}" type="datetimeFigureOut">
               <a:rPr lang="en-US" smtClean="0"/>
-              <a:t>8/31/25</a:t>
+              <a:t>9/11/25</a:t>
             </a:fld>
             <a:endParaRPr lang="en-US"/>
           </a:p>
@@ -615,7 +615,7 @@
           <a:p>
             <a:fld id="{9ACABC11-4237-A549-BB53-4707F8654146}" type="datetimeFigureOut">
               <a:rPr lang="en-US" smtClean="0"/>
-              <a:t>8/31/25</a:t>
+              <a:t>9/11/25</a:t>
             </a:fld>
             <a:endParaRPr lang="en-US"/>
           </a:p>
@@ -815,7 +815,7 @@
           <a:p>
             <a:fld id="{9ACABC11-4237-A549-BB53-4707F8654146}" type="datetimeFigureOut">
               <a:rPr lang="en-US" smtClean="0"/>
-              <a:t>8/31/25</a:t>
+              <a:t>9/11/25</a:t>
             </a:fld>
             <a:endParaRPr lang="en-US"/>
           </a:p>
@@ -1025,7 +1025,7 @@
           <a:p>
             <a:fld id="{9ACABC11-4237-A549-BB53-4707F8654146}" type="datetimeFigureOut">
               <a:rPr lang="en-US" smtClean="0"/>
-              <a:t>8/31/25</a:t>
+              <a:t>9/11/25</a:t>
             </a:fld>
             <a:endParaRPr lang="en-US"/>
           </a:p>
@@ -1225,7 +1225,7 @@
           <a:p>
             <a:fld id="{9ACABC11-4237-A549-BB53-4707F8654146}" type="datetimeFigureOut">
               <a:rPr lang="en-US" smtClean="0"/>
-              <a:t>8/31/25</a:t>
+              <a:t>9/11/25</a:t>
             </a:fld>
             <a:endParaRPr lang="en-US"/>
           </a:p>
@@ -1501,7 +1501,7 @@
           <a:p>
             <a:fld id="{9ACABC11-4237-A549-BB53-4707F8654146}" type="datetimeFigureOut">
               <a:rPr lang="en-US" smtClean="0"/>
-              <a:t>8/31/25</a:t>
+              <a:t>9/11/25</a:t>
             </a:fld>
             <a:endParaRPr lang="en-US"/>
           </a:p>
@@ -1769,7 +1769,7 @@
           <a:p>
             <a:fld id="{9ACABC11-4237-A549-BB53-4707F8654146}" type="datetimeFigureOut">
               <a:rPr lang="en-US" smtClean="0"/>
-              <a:t>8/31/25</a:t>
+              <a:t>9/11/25</a:t>
             </a:fld>
             <a:endParaRPr lang="en-US"/>
           </a:p>
@@ -2184,7 +2184,7 @@
           <a:p>
             <a:fld id="{9ACABC11-4237-A549-BB53-4707F8654146}" type="datetimeFigureOut">
               <a:rPr lang="en-US" smtClean="0"/>
-              <a:t>8/31/25</a:t>
+              <a:t>9/11/25</a:t>
             </a:fld>
             <a:endParaRPr lang="en-US"/>
           </a:p>
@@ -2326,7 +2326,7 @@
           <a:p>
             <a:fld id="{9ACABC11-4237-A549-BB53-4707F8654146}" type="datetimeFigureOut">
               <a:rPr lang="en-US" smtClean="0"/>
-              <a:t>8/31/25</a:t>
+              <a:t>9/11/25</a:t>
             </a:fld>
             <a:endParaRPr lang="en-US"/>
           </a:p>
@@ -2439,7 +2439,7 @@
           <a:p>
             <a:fld id="{9ACABC11-4237-A549-BB53-4707F8654146}" type="datetimeFigureOut">
               <a:rPr lang="en-US" smtClean="0"/>
-              <a:t>8/31/25</a:t>
+              <a:t>9/11/25</a:t>
             </a:fld>
             <a:endParaRPr lang="en-US"/>
           </a:p>
@@ -2752,7 +2752,7 @@
           <a:p>
             <a:fld id="{9ACABC11-4237-A549-BB53-4707F8654146}" type="datetimeFigureOut">
               <a:rPr lang="en-US" smtClean="0"/>
-              <a:t>8/31/25</a:t>
+              <a:t>9/11/25</a:t>
             </a:fld>
             <a:endParaRPr lang="en-US"/>
           </a:p>
@@ -3041,7 +3041,7 @@
           <a:p>
             <a:fld id="{9ACABC11-4237-A549-BB53-4707F8654146}" type="datetimeFigureOut">
               <a:rPr lang="en-US" smtClean="0"/>
-              <a:t>8/31/25</a:t>
+              <a:t>9/11/25</a:t>
             </a:fld>
             <a:endParaRPr lang="en-US"/>
           </a:p>
@@ -3284,7 +3284,7 @@
           <a:p>
             <a:fld id="{9ACABC11-4237-A549-BB53-4707F8654146}" type="datetimeFigureOut">
               <a:rPr lang="en-US" smtClean="0"/>
-              <a:t>8/31/25</a:t>
+              <a:t>9/11/25</a:t>
             </a:fld>
             <a:endParaRPr lang="en-US"/>
           </a:p>
@@ -3715,7 +3715,7 @@
         </p:nvGrpSpPr>
         <p:grpSpPr>
           <a:xfrm>
-            <a:off x="0" y="860553"/>
+            <a:off x="244549" y="860553"/>
             <a:ext cx="11357113" cy="3799962"/>
             <a:chOff x="0" y="860553"/>
             <a:chExt cx="11357113" cy="3799962"/>
@@ -3809,6 +3809,35 @@
           </a:prstGeom>
         </p:spPr>
       </p:pic>
+      <p:pic>
+        <p:nvPicPr>
+          <p:cNvPr id="4" name="Picture 3">
+            <a:extLst>
+              <a:ext uri="{FF2B5EF4-FFF2-40B4-BE49-F238E27FC236}">
+                <a16:creationId xmlns:a16="http://schemas.microsoft.com/office/drawing/2014/main" id="{DA4BAE82-1A1A-4162-A919-0D7AC2EA36F2}"/>
+              </a:ext>
+            </a:extLst>
+          </p:cNvPr>
+          <p:cNvPicPr>
+            <a:picLocks noChangeAspect="1"/>
+          </p:cNvPicPr>
+          <p:nvPr/>
+        </p:nvPicPr>
+        <p:blipFill rotWithShape="1">
+          <a:blip r:embed="rId5"/>
+          <a:srcRect t="10823" r="6848"/>
+          <a:stretch/>
+        </p:blipFill>
+        <p:spPr>
+          <a:xfrm>
+            <a:off x="159489" y="2464067"/>
+            <a:ext cx="11442173" cy="2196449"/>
+          </a:xfrm>
+          <a:prstGeom prst="rect">
+            <a:avLst/>
+          </a:prstGeom>
+        </p:spPr>
+      </p:pic>
     </p:spTree>
     <p:extLst>
       <p:ext uri="{BB962C8B-B14F-4D97-AF65-F5344CB8AC3E}">
@@ -3839,85 +3868,35 @@
           <a:chExt cx="0" cy="0"/>
         </a:xfrm>
       </p:grpSpPr>
-      <p:grpSp>
-        <p:nvGrpSpPr>
-          <p:cNvPr id="29" name="Group 28">
-            <a:extLst>
-              <a:ext uri="{FF2B5EF4-FFF2-40B4-BE49-F238E27FC236}">
-                <a16:creationId xmlns:a16="http://schemas.microsoft.com/office/drawing/2014/main" id="{456610A8-0F06-8390-24CD-B8C5D784256A}"/>
-              </a:ext>
-            </a:extLst>
-          </p:cNvPr>
-          <p:cNvGrpSpPr/>
+      <p:pic>
+        <p:nvPicPr>
+          <p:cNvPr id="30" name="Picture 29">
+            <a:extLst>
+              <a:ext uri="{FF2B5EF4-FFF2-40B4-BE49-F238E27FC236}">
+                <a16:creationId xmlns:a16="http://schemas.microsoft.com/office/drawing/2014/main" id="{B05FE49E-B1DF-301A-85DC-88DCFBADB384}"/>
+              </a:ext>
+            </a:extLst>
+          </p:cNvPr>
+          <p:cNvPicPr>
+            <a:picLocks noChangeAspect="1"/>
+          </p:cNvPicPr>
           <p:nvPr/>
-        </p:nvGrpSpPr>
-        <p:grpSpPr>
+        </p:nvPicPr>
+        <p:blipFill rotWithShape="1">
+          <a:blip r:embed="rId2"/>
+          <a:srcRect l="2483" t="6269" r="6974" b="89643"/>
+          <a:stretch/>
+        </p:blipFill>
+        <p:spPr>
           <a:xfrm>
-            <a:off x="432883" y="1633166"/>
-            <a:ext cx="10164125" cy="2894311"/>
-            <a:chOff x="0" y="860553"/>
-            <a:chExt cx="11360684" cy="3113198"/>
+            <a:off x="705918" y="1633166"/>
+            <a:ext cx="9891090" cy="1490772"/>
           </a:xfrm>
-        </p:grpSpPr>
-        <p:pic>
-          <p:nvPicPr>
-            <p:cNvPr id="30" name="Picture 29">
-              <a:extLst>
-                <a:ext uri="{FF2B5EF4-FFF2-40B4-BE49-F238E27FC236}">
-                  <a16:creationId xmlns:a16="http://schemas.microsoft.com/office/drawing/2014/main" id="{B05FE49E-B1DF-301A-85DC-88DCFBADB384}"/>
-                </a:ext>
-              </a:extLst>
-            </p:cNvPr>
-            <p:cNvPicPr>
-              <a:picLocks noChangeAspect="1"/>
-            </p:cNvPicPr>
-            <p:nvPr/>
-          </p:nvPicPr>
-          <p:blipFill rotWithShape="1">
-            <a:blip r:embed="rId2"/>
-            <a:srcRect l="2483" t="6269" r="6974" b="89643"/>
-            <a:stretch/>
-          </p:blipFill>
-          <p:spPr>
-            <a:xfrm>
-              <a:off x="305178" y="860553"/>
-              <a:ext cx="11055506" cy="1603514"/>
-            </a:xfrm>
-            <a:prstGeom prst="rect">
-              <a:avLst/>
-            </a:prstGeom>
-          </p:spPr>
-        </p:pic>
-        <p:pic>
-          <p:nvPicPr>
-            <p:cNvPr id="32" name="Picture 31">
-              <a:extLst>
-                <a:ext uri="{FF2B5EF4-FFF2-40B4-BE49-F238E27FC236}">
-                  <a16:creationId xmlns:a16="http://schemas.microsoft.com/office/drawing/2014/main" id="{4CEC790D-F5F6-8A52-6DE4-82D293CDA0DF}"/>
-                </a:ext>
-              </a:extLst>
-            </p:cNvPr>
-            <p:cNvPicPr>
-              <a:picLocks noChangeAspect="1"/>
-            </p:cNvPicPr>
-            <p:nvPr/>
-          </p:nvPicPr>
-          <p:blipFill rotWithShape="1">
-            <a:blip r:embed="rId3"/>
-            <a:srcRect t="10823" r="6848" b="27883"/>
-            <a:stretch/>
-          </p:blipFill>
-          <p:spPr>
-            <a:xfrm>
-              <a:off x="0" y="2464068"/>
-              <a:ext cx="11357113" cy="1509683"/>
-            </a:xfrm>
-            <a:prstGeom prst="rect">
-              <a:avLst/>
-            </a:prstGeom>
-          </p:spPr>
-        </p:pic>
-      </p:grpSp>
+          <a:prstGeom prst="rect">
+            <a:avLst/>
+          </a:prstGeom>
+        </p:spPr>
+      </p:pic>
       <p:sp>
         <p:nvSpPr>
           <p:cNvPr id="2" name="TextBox 1">
@@ -3932,7 +3911,7 @@
         </p:nvSpPr>
         <p:spPr>
           <a:xfrm>
-            <a:off x="2576895" y="643912"/>
+            <a:off x="2574802" y="413408"/>
             <a:ext cx="6833474" cy="369332"/>
           </a:xfrm>
           <a:prstGeom prst="rect">
@@ -3968,13 +3947,13 @@
           <p:nvPr/>
         </p:nvPicPr>
         <p:blipFill rotWithShape="1">
-          <a:blip r:embed="rId4"/>
+          <a:blip r:embed="rId3"/>
           <a:srcRect l="12533" t="25146" r="81057" b="58659"/>
           <a:stretch/>
         </p:blipFill>
         <p:spPr>
           <a:xfrm>
-            <a:off x="1230206" y="1730337"/>
+            <a:off x="1174709" y="1730337"/>
             <a:ext cx="730470" cy="1291974"/>
           </a:xfrm>
           <a:prstGeom prst="rect">
@@ -3997,13 +3976,13 @@
           <p:nvPr/>
         </p:nvPicPr>
         <p:blipFill rotWithShape="1">
-          <a:blip r:embed="rId4"/>
+          <a:blip r:embed="rId3"/>
           <a:srcRect l="26328" t="25146" r="69844" b="58120"/>
           <a:stretch/>
         </p:blipFill>
         <p:spPr>
           <a:xfrm>
-            <a:off x="3200181" y="1719753"/>
+            <a:off x="3119061" y="1726452"/>
             <a:ext cx="483457" cy="1349251"/>
           </a:xfrm>
           <a:prstGeom prst="rect">
@@ -4026,13 +4005,13 @@
           <p:nvPr/>
         </p:nvPicPr>
         <p:blipFill rotWithShape="1">
-          <a:blip r:embed="rId4"/>
+          <a:blip r:embed="rId3"/>
           <a:srcRect l="45103" t="25146" r="51069" b="58120"/>
           <a:stretch/>
         </p:blipFill>
         <p:spPr>
           <a:xfrm>
-            <a:off x="5751904" y="1726452"/>
+            <a:off x="5749810" y="1726452"/>
             <a:ext cx="483457" cy="1349251"/>
           </a:xfrm>
           <a:prstGeom prst="rect">
@@ -4055,7 +4034,7 @@
           <p:nvPr/>
         </p:nvPicPr>
         <p:blipFill rotWithShape="1">
-          <a:blip r:embed="rId4"/>
+          <a:blip r:embed="rId3"/>
           <a:srcRect l="69023" t="25146" r="26160" b="58120"/>
           <a:stretch/>
         </p:blipFill>
@@ -4083,7 +4062,7 @@
         </p:nvSpPr>
         <p:spPr>
           <a:xfrm>
-            <a:off x="602281" y="1145431"/>
+            <a:off x="600188" y="1171547"/>
             <a:ext cx="2931765" cy="369332"/>
           </a:xfrm>
           <a:prstGeom prst="rect">
@@ -4122,7 +4101,7 @@
         </p:nvSpPr>
         <p:spPr>
           <a:xfrm rot="16200000">
-            <a:off x="-1618066" y="2973592"/>
+            <a:off x="-1620159" y="2743088"/>
             <a:ext cx="3656322" cy="369332"/>
           </a:xfrm>
           <a:prstGeom prst="rect">
@@ -4158,13 +4137,13 @@
           <p:nvPr/>
         </p:nvPicPr>
         <p:blipFill rotWithShape="1">
-          <a:blip r:embed="rId5"/>
+          <a:blip r:embed="rId4"/>
           <a:srcRect l="81222" t="61175" r="17905" b="28891"/>
           <a:stretch/>
         </p:blipFill>
         <p:spPr>
           <a:xfrm>
-            <a:off x="10772608" y="4296400"/>
+            <a:off x="10772608" y="4238129"/>
             <a:ext cx="110019" cy="223236"/>
           </a:xfrm>
           <a:prstGeom prst="rect">
@@ -4227,7 +4206,7 @@
               <p:nvPr/>
             </p:nvPicPr>
             <p:blipFill rotWithShape="1">
-              <a:blip r:embed="rId4"/>
+              <a:blip r:embed="rId3"/>
               <a:srcRect l="82951" t="39385" r="15576" b="58324"/>
               <a:stretch/>
             </p:blipFill>
@@ -4256,7 +4235,7 @@
               <p:nvPr/>
             </p:nvPicPr>
             <p:blipFill rotWithShape="1">
-              <a:blip r:embed="rId4"/>
+              <a:blip r:embed="rId3"/>
               <a:srcRect l="82646" t="25687" r="15318" b="67298"/>
               <a:stretch/>
             </p:blipFill>
@@ -4358,7 +4337,7 @@
         </p:nvSpPr>
         <p:spPr>
           <a:xfrm>
-            <a:off x="11005096" y="4281255"/>
+            <a:off x="11005096" y="4222984"/>
             <a:ext cx="341760" cy="246221"/>
           </a:xfrm>
           <a:prstGeom prst="rect">
@@ -4397,7 +4376,7 @@
         </p:nvSpPr>
         <p:spPr>
           <a:xfrm>
-            <a:off x="10859584" y="4567965"/>
+            <a:off x="10859584" y="4509694"/>
             <a:ext cx="1332416" cy="246221"/>
           </a:xfrm>
           <a:prstGeom prst="rect">
@@ -4465,7 +4444,7 @@
           <p:nvPr/>
         </p:nvPicPr>
         <p:blipFill rotWithShape="1">
-          <a:blip r:embed="rId4"/>
+          <a:blip r:embed="rId3"/>
           <a:srcRect l="93502" t="51099" r="2534" b="43959"/>
           <a:stretch/>
         </p:blipFill>
@@ -4535,14 +4514,14 @@
           <p:nvPr/>
         </p:nvPicPr>
         <p:blipFill rotWithShape="1">
-          <a:blip r:embed="rId6"/>
+          <a:blip r:embed="rId5"/>
           <a:srcRect b="23627"/>
           <a:stretch/>
         </p:blipFill>
         <p:spPr>
           <a:xfrm>
-            <a:off x="669871" y="4631487"/>
-            <a:ext cx="9970420" cy="111677"/>
+            <a:off x="676030" y="4573216"/>
+            <a:ext cx="9967585" cy="111677"/>
           </a:xfrm>
           <a:prstGeom prst="rect">
             <a:avLst/>
@@ -4564,14 +4543,43 @@
           <p:nvPr/>
         </p:nvPicPr>
         <p:blipFill rotWithShape="1">
-          <a:blip r:embed="rId7"/>
+          <a:blip r:embed="rId6"/>
           <a:srcRect l="87596" t="4" r="11099" b="23623"/>
           <a:stretch/>
         </p:blipFill>
         <p:spPr>
           <a:xfrm>
-            <a:off x="10772608" y="4631488"/>
+            <a:off x="10772608" y="4573217"/>
             <a:ext cx="130112" cy="111676"/>
+          </a:xfrm>
+          <a:prstGeom prst="rect">
+            <a:avLst/>
+          </a:prstGeom>
+        </p:spPr>
+      </p:pic>
+      <p:pic>
+        <p:nvPicPr>
+          <p:cNvPr id="5" name="Picture 4">
+            <a:extLst>
+              <a:ext uri="{FF2B5EF4-FFF2-40B4-BE49-F238E27FC236}">
+                <a16:creationId xmlns:a16="http://schemas.microsoft.com/office/drawing/2014/main" id="{E0E54360-3A38-E1A5-1036-791F0EFD9A70}"/>
+              </a:ext>
+            </a:extLst>
+          </p:cNvPr>
+          <p:cNvPicPr>
+            <a:picLocks noChangeAspect="1"/>
+          </p:cNvPicPr>
+          <p:nvPr/>
+        </p:nvPicPr>
+        <p:blipFill rotWithShape="1">
+          <a:blip r:embed="rId7"/>
+          <a:srcRect t="10823" r="6848" b="27738"/>
+          <a:stretch/>
+        </p:blipFill>
+        <p:spPr>
+          <a:xfrm>
+            <a:off x="369478" y="3114598"/>
+            <a:ext cx="10227530" cy="1349251"/>
           </a:xfrm>
           <a:prstGeom prst="rect">
             <a:avLst/>
@@ -5182,6 +5190,26 @@
 </file>
 
 <file path=customXml/item1.xml><?xml version="1.0" encoding="utf-8"?>
+<p:properties xmlns:p="http://schemas.microsoft.com/office/2006/metadata/properties" xmlns:xsi="http://www.w3.org/2001/XMLSchema-instance" xmlns:pc="http://schemas.microsoft.com/office/infopath/2007/PartnerControls">
+  <documentManagement>
+    <TaxCatchAll xmlns="4c318972-60f5-4afa-98f6-c19520574e57" xsi:nil="true"/>
+    <lcf76f155ced4ddcb4097134ff3c332f xmlns="ac5dfaab-0878-459b-b0b1-00a629eabd85">
+      <Terms xmlns="http://schemas.microsoft.com/office/infopath/2007/PartnerControls"/>
+    </lcf76f155ced4ddcb4097134ff3c332f>
+  </documentManagement>
+</p:properties>
+</file>
+
+<file path=customXml/item2.xml><?xml version="1.0" encoding="utf-8"?>
+<?mso-contentType ?>
+<FormTemplates xmlns="http://schemas.microsoft.com/sharepoint/v3/contenttype/forms">
+  <Display>DocumentLibraryForm</Display>
+  <Edit>DocumentLibraryForm</Edit>
+  <New>DocumentLibraryForm</New>
+</FormTemplates>
+</file>
+
+<file path=customXml/item3.xml><?xml version="1.0" encoding="utf-8"?>
 <ct:contentTypeSchema xmlns:ct="http://schemas.microsoft.com/office/2006/metadata/contentType" xmlns:ma="http://schemas.microsoft.com/office/2006/metadata/properties/metaAttributes" ct:_="" ma:_="" ma:contentTypeName="Document" ma:contentTypeID="0x0101009FE6439232332249822FBB3717BF308A" ma:contentTypeVersion="15" ma:contentTypeDescription="Create a new document." ma:contentTypeScope="" ma:versionID="701781068bddb0acf2f4ccc9e7a6a799">
   <xsd:schema xmlns:xsd="http://www.w3.org/2001/XMLSchema" xmlns:xs="http://www.w3.org/2001/XMLSchema" xmlns:p="http://schemas.microsoft.com/office/2006/metadata/properties" xmlns:ns2="ac5dfaab-0878-459b-b0b1-00a629eabd85" xmlns:ns3="4c318972-60f5-4afa-98f6-c19520574e57" targetNamespace="http://schemas.microsoft.com/office/2006/metadata/properties" ma:root="true" ma:fieldsID="1e97419e04d06508345b0a854171ee4d" ns2:_="" ns3:_="">
     <xsd:import namespace="ac5dfaab-0878-459b-b0b1-00a629eabd85"/>
@@ -5418,27 +5446,26 @@
 </ct:contentTypeSchema>
 </file>
 
-<file path=customXml/item2.xml><?xml version="1.0" encoding="utf-8"?>
-<?mso-contentType ?>
-<FormTemplates xmlns="http://schemas.microsoft.com/sharepoint/v3/contenttype/forms">
-  <Display>DocumentLibraryForm</Display>
-  <Edit>DocumentLibraryForm</Edit>
-  <New>DocumentLibraryForm</New>
-</FormTemplates>
+<file path=customXml/itemProps1.xml><?xml version="1.0" encoding="utf-8"?>
+<ds:datastoreItem xmlns:ds="http://schemas.openxmlformats.org/officeDocument/2006/customXml" ds:itemID="{E579B129-5F64-4169-A8A6-BBD9F9947508}">
+  <ds:schemaRefs>
+    <ds:schemaRef ds:uri="http://schemas.microsoft.com/office/2006/metadata/properties"/>
+    <ds:schemaRef ds:uri="http://schemas.microsoft.com/office/infopath/2007/PartnerControls"/>
+    <ds:schemaRef ds:uri="4c318972-60f5-4afa-98f6-c19520574e57"/>
+    <ds:schemaRef ds:uri="ac5dfaab-0878-459b-b0b1-00a629eabd85"/>
+  </ds:schemaRefs>
+</ds:datastoreItem>
 </file>
 
-<file path=customXml/item3.xml><?xml version="1.0" encoding="utf-8"?>
-<p:properties xmlns:p="http://schemas.microsoft.com/office/2006/metadata/properties" xmlns:xsi="http://www.w3.org/2001/XMLSchema-instance" xmlns:pc="http://schemas.microsoft.com/office/infopath/2007/PartnerControls">
-  <documentManagement>
-    <TaxCatchAll xmlns="4c318972-60f5-4afa-98f6-c19520574e57" xsi:nil="true"/>
-    <lcf76f155ced4ddcb4097134ff3c332f xmlns="ac5dfaab-0878-459b-b0b1-00a629eabd85">
-      <Terms xmlns="http://schemas.microsoft.com/office/infopath/2007/PartnerControls"/>
-    </lcf76f155ced4ddcb4097134ff3c332f>
-  </documentManagement>
-</p:properties>
+<file path=customXml/itemProps2.xml><?xml version="1.0" encoding="utf-8"?>
+<ds:datastoreItem xmlns:ds="http://schemas.openxmlformats.org/officeDocument/2006/customXml" ds:itemID="{26564D8D-6CAA-45DD-B2E6-6B9B67D9E68E}">
+  <ds:schemaRefs>
+    <ds:schemaRef ds:uri="http://schemas.microsoft.com/sharepoint/v3/contenttype/forms"/>
+  </ds:schemaRefs>
+</ds:datastoreItem>
 </file>
 
-<file path=customXml/itemProps1.xml><?xml version="1.0" encoding="utf-8"?>
+<file path=customXml/itemProps3.xml><?xml version="1.0" encoding="utf-8"?>
 <ds:datastoreItem xmlns:ds="http://schemas.openxmlformats.org/officeDocument/2006/customXml" ds:itemID="{99549F9B-1475-4ADC-97CC-10031B869BF7}">
   <ds:schemaRefs>
     <ds:schemaRef ds:uri="http://schemas.microsoft.com/office/2006/metadata/contentType"/>
@@ -5455,23 +5482,4 @@
     <ds:schemaRef ds:uri="http://schemas.microsoft.com/internal/obd"/>
   </ds:schemaRefs>
 </ds:datastoreItem>
-</file>
-
-<file path=customXml/itemProps2.xml><?xml version="1.0" encoding="utf-8"?>
-<ds:datastoreItem xmlns:ds="http://schemas.openxmlformats.org/officeDocument/2006/customXml" ds:itemID="{26564D8D-6CAA-45DD-B2E6-6B9B67D9E68E}">
-  <ds:schemaRefs>
-    <ds:schemaRef ds:uri="http://schemas.microsoft.com/sharepoint/v3/contenttype/forms"/>
-  </ds:schemaRefs>
-</ds:datastoreItem>
-</file>
-
-<file path=customXml/itemProps3.xml><?xml version="1.0" encoding="utf-8"?>
-<ds:datastoreItem xmlns:ds="http://schemas.openxmlformats.org/officeDocument/2006/customXml" ds:itemID="{E579B129-5F64-4169-A8A6-BBD9F9947508}">
-  <ds:schemaRefs>
-    <ds:schemaRef ds:uri="http://schemas.microsoft.com/office/2006/metadata/properties"/>
-    <ds:schemaRef ds:uri="http://schemas.microsoft.com/office/infopath/2007/PartnerControls"/>
-    <ds:schemaRef ds:uri="4c318972-60f5-4afa-98f6-c19520574e57"/>
-    <ds:schemaRef ds:uri="ac5dfaab-0878-459b-b0b1-00a629eabd85"/>
-  </ds:schemaRefs>
-</ds:datastoreItem>
 </file>
--- a/results/figures_tables/combine/beautify.pptx
+++ b/results/figures_tables/combine/beautify.pptx
@@ -198,7 +198,7 @@
           <a:p>
             <a:fld id="{8FE5EFEB-AEDE-FC4C-BD98-BCAAA9CB9605}" type="datetimeFigureOut">
               <a:rPr lang="en-US" smtClean="0"/>
-              <a:t>9/11/25</a:t>
+              <a:t>10/16/25</a:t>
             </a:fld>
             <a:endParaRPr lang="en-US"/>
           </a:p>
@@ -615,7 +615,7 @@
           <a:p>
             <a:fld id="{9ACABC11-4237-A549-BB53-4707F8654146}" type="datetimeFigureOut">
               <a:rPr lang="en-US" smtClean="0"/>
-              <a:t>9/11/25</a:t>
+              <a:t>10/16/25</a:t>
             </a:fld>
             <a:endParaRPr lang="en-US"/>
           </a:p>
@@ -815,7 +815,7 @@
           <a:p>
             <a:fld id="{9ACABC11-4237-A549-BB53-4707F8654146}" type="datetimeFigureOut">
               <a:rPr lang="en-US" smtClean="0"/>
-              <a:t>9/11/25</a:t>
+              <a:t>10/16/25</a:t>
             </a:fld>
             <a:endParaRPr lang="en-US"/>
           </a:p>
@@ -1025,7 +1025,7 @@
           <a:p>
             <a:fld id="{9ACABC11-4237-A549-BB53-4707F8654146}" type="datetimeFigureOut">
               <a:rPr lang="en-US" smtClean="0"/>
-              <a:t>9/11/25</a:t>
+              <a:t>10/16/25</a:t>
             </a:fld>
             <a:endParaRPr lang="en-US"/>
           </a:p>
@@ -1225,7 +1225,7 @@
           <a:p>
             <a:fld id="{9ACABC11-4237-A549-BB53-4707F8654146}" type="datetimeFigureOut">
               <a:rPr lang="en-US" smtClean="0"/>
-              <a:t>9/11/25</a:t>
+              <a:t>10/16/25</a:t>
             </a:fld>
             <a:endParaRPr lang="en-US"/>
           </a:p>
@@ -1501,7 +1501,7 @@
           <a:p>
             <a:fld id="{9ACABC11-4237-A549-BB53-4707F8654146}" type="datetimeFigureOut">
               <a:rPr lang="en-US" smtClean="0"/>
-              <a:t>9/11/25</a:t>
+              <a:t>10/16/25</a:t>
             </a:fld>
             <a:endParaRPr lang="en-US"/>
           </a:p>
@@ -1769,7 +1769,7 @@
           <a:p>
             <a:fld id="{9ACABC11-4237-A549-BB53-4707F8654146}" type="datetimeFigureOut">
               <a:rPr lang="en-US" smtClean="0"/>
-              <a:t>9/11/25</a:t>
+              <a:t>10/16/25</a:t>
             </a:fld>
             <a:endParaRPr lang="en-US"/>
           </a:p>
@@ -2184,7 +2184,7 @@
           <a:p>
             <a:fld id="{9ACABC11-4237-A549-BB53-4707F8654146}" type="datetimeFigureOut">
               <a:rPr lang="en-US" smtClean="0"/>
-              <a:t>9/11/25</a:t>
+              <a:t>10/16/25</a:t>
             </a:fld>
             <a:endParaRPr lang="en-US"/>
           </a:p>
@@ -2326,7 +2326,7 @@
           <a:p>
             <a:fld id="{9ACABC11-4237-A549-BB53-4707F8654146}" type="datetimeFigureOut">
               <a:rPr lang="en-US" smtClean="0"/>
-              <a:t>9/11/25</a:t>
+              <a:t>10/16/25</a:t>
             </a:fld>
             <a:endParaRPr lang="en-US"/>
           </a:p>
@@ -2439,7 +2439,7 @@
           <a:p>
             <a:fld id="{9ACABC11-4237-A549-BB53-4707F8654146}" type="datetimeFigureOut">
               <a:rPr lang="en-US" smtClean="0"/>
-              <a:t>9/11/25</a:t>
+              <a:t>10/16/25</a:t>
             </a:fld>
             <a:endParaRPr lang="en-US"/>
           </a:p>
@@ -2752,7 +2752,7 @@
           <a:p>
             <a:fld id="{9ACABC11-4237-A549-BB53-4707F8654146}" type="datetimeFigureOut">
               <a:rPr lang="en-US" smtClean="0"/>
-              <a:t>9/11/25</a:t>
+              <a:t>10/16/25</a:t>
             </a:fld>
             <a:endParaRPr lang="en-US"/>
           </a:p>
@@ -3041,7 +3041,7 @@
           <a:p>
             <a:fld id="{9ACABC11-4237-A549-BB53-4707F8654146}" type="datetimeFigureOut">
               <a:rPr lang="en-US" smtClean="0"/>
-              <a:t>9/11/25</a:t>
+              <a:t>10/16/25</a:t>
             </a:fld>
             <a:endParaRPr lang="en-US"/>
           </a:p>
@@ -3284,7 +3284,7 @@
           <a:p>
             <a:fld id="{9ACABC11-4237-A549-BB53-4707F8654146}" type="datetimeFigureOut">
               <a:rPr lang="en-US" smtClean="0"/>
-              <a:t>9/11/25</a:t>
+              <a:t>10/16/25</a:t>
             </a:fld>
             <a:endParaRPr lang="en-US"/>
           </a:p>
@@ -3883,7 +3883,9 @@
           <p:nvPr/>
         </p:nvPicPr>
         <p:blipFill rotWithShape="1">
-          <a:blip r:embed="rId2"/>
+          <a:blip r:embed="rId2">
+            <a:alphaModFix/>
+          </a:blip>
           <a:srcRect l="2483" t="6269" r="6974" b="89643"/>
           <a:stretch/>
         </p:blipFill>
@@ -3911,8 +3913,8 @@
         </p:nvSpPr>
         <p:spPr>
           <a:xfrm>
-            <a:off x="2574802" y="413408"/>
-            <a:ext cx="6833474" cy="369332"/>
+            <a:off x="2594680" y="108589"/>
+            <a:ext cx="7782900" cy="369332"/>
           </a:xfrm>
           <a:prstGeom prst="rect">
             <a:avLst/>
@@ -3926,18 +3928,104 @@
           <a:lstStyle/>
           <a:p>
             <a:r>
-              <a:rPr lang="en-US" b="1" dirty="0"/>
+              <a:rPr lang="en-US" b="1" dirty="0">
+                <a:latin typeface="Arial" panose="020B0604020202020204" pitchFamily="34" charset="0"/>
+                <a:cs typeface="Arial" panose="020B0604020202020204" pitchFamily="34" charset="0"/>
+              </a:rPr>
               <a:t>HTF haplotype - O-antigen OBC genes presence/absence (m53 + h34)</a:t>
+            </a:r>
+          </a:p>
+        </p:txBody>
+      </p:sp>
+      <p:sp>
+        <p:nvSpPr>
+          <p:cNvPr id="10" name="TextBox 9">
+            <a:extLst>
+              <a:ext uri="{FF2B5EF4-FFF2-40B4-BE49-F238E27FC236}">
+                <a16:creationId xmlns:a16="http://schemas.microsoft.com/office/drawing/2014/main" id="{F4E10B34-0079-DA20-DA10-48C3AA4BE8DA}"/>
+              </a:ext>
+            </a:extLst>
+          </p:cNvPr>
+          <p:cNvSpPr txBox="1"/>
+          <p:nvPr/>
+        </p:nvSpPr>
+        <p:spPr>
+          <a:xfrm>
+            <a:off x="4297987" y="1340086"/>
+            <a:ext cx="2298834" cy="276999"/>
+          </a:xfrm>
+          <a:prstGeom prst="rect">
+            <a:avLst/>
+          </a:prstGeom>
+          <a:noFill/>
+        </p:spPr>
+        <p:txBody>
+          <a:bodyPr wrap="none" rtlCol="0">
+            <a:spAutoFit/>
+          </a:bodyPr>
+          <a:lstStyle/>
+          <a:p>
+            <a:r>
+              <a:rPr lang="en-US" sz="1200" b="1" dirty="0" err="1">
+                <a:latin typeface="Arial" panose="020B0604020202020204" pitchFamily="34" charset="0"/>
+                <a:cs typeface="Arial" panose="020B0604020202020204" pitchFamily="34" charset="0"/>
+              </a:rPr>
+              <a:t>Tailocin</a:t>
+            </a:r>
+            <a:r>
+              <a:rPr lang="en-US" sz="1200" b="1" dirty="0">
+                <a:latin typeface="Arial" panose="020B0604020202020204" pitchFamily="34" charset="0"/>
+                <a:cs typeface="Arial" panose="020B0604020202020204" pitchFamily="34" charset="0"/>
+              </a:rPr>
+              <a:t> tail fiber haplotypes </a:t>
+            </a:r>
+          </a:p>
+        </p:txBody>
+      </p:sp>
+      <p:sp>
+        <p:nvSpPr>
+          <p:cNvPr id="11" name="TextBox 10">
+            <a:extLst>
+              <a:ext uri="{FF2B5EF4-FFF2-40B4-BE49-F238E27FC236}">
+                <a16:creationId xmlns:a16="http://schemas.microsoft.com/office/drawing/2014/main" id="{825F79EB-D7C2-E6A9-7C1C-C86069F4C829}"/>
+              </a:ext>
+            </a:extLst>
+          </p:cNvPr>
+          <p:cNvSpPr txBox="1"/>
+          <p:nvPr/>
+        </p:nvSpPr>
+        <p:spPr>
+          <a:xfrm rot="16200000">
+            <a:off x="-1203921" y="3035790"/>
+            <a:ext cx="2922595" cy="276999"/>
+          </a:xfrm>
+          <a:prstGeom prst="rect">
+            <a:avLst/>
+          </a:prstGeom>
+          <a:noFill/>
+        </p:spPr>
+        <p:txBody>
+          <a:bodyPr wrap="none" rtlCol="0">
+            <a:spAutoFit/>
+          </a:bodyPr>
+          <a:lstStyle/>
+          <a:p>
+            <a:r>
+              <a:rPr lang="en-US" sz="1200" b="1" dirty="0">
+                <a:latin typeface="Arial" panose="020B0604020202020204" pitchFamily="34" charset="0"/>
+                <a:cs typeface="Arial" panose="020B0604020202020204" pitchFamily="34" charset="0"/>
+              </a:rPr>
+              <a:t>O-antigen biosynthesis cluster genes</a:t>
             </a:r>
           </a:p>
         </p:txBody>
       </p:sp>
       <p:pic>
         <p:nvPicPr>
-          <p:cNvPr id="6" name="Picture 5" descr="A group of colorful arrows&#10;&#10;Description automatically generated">
-            <a:extLst>
-              <a:ext uri="{FF2B5EF4-FFF2-40B4-BE49-F238E27FC236}">
-                <a16:creationId xmlns:a16="http://schemas.microsoft.com/office/drawing/2014/main" id="{0A45977E-0B79-2BEB-AD4F-645ED907D757}"/>
+          <p:cNvPr id="16" name="Picture 15">
+            <a:extLst>
+              <a:ext uri="{FF2B5EF4-FFF2-40B4-BE49-F238E27FC236}">
+                <a16:creationId xmlns:a16="http://schemas.microsoft.com/office/drawing/2014/main" id="{70021C95-B209-0097-F8DF-F1D3E99B45B8}"/>
               </a:ext>
             </a:extLst>
           </p:cNvPr>
@@ -3948,196 +4036,6 @@
         </p:nvPicPr>
         <p:blipFill rotWithShape="1">
           <a:blip r:embed="rId3"/>
-          <a:srcRect l="12533" t="25146" r="81057" b="58659"/>
-          <a:stretch/>
-        </p:blipFill>
-        <p:spPr>
-          <a:xfrm>
-            <a:off x="1174709" y="1730337"/>
-            <a:ext cx="730470" cy="1291974"/>
-          </a:xfrm>
-          <a:prstGeom prst="rect">
-            <a:avLst/>
-          </a:prstGeom>
-        </p:spPr>
-      </p:pic>
-      <p:pic>
-        <p:nvPicPr>
-          <p:cNvPr id="7" name="Picture 6" descr="A group of colorful arrows&#10;&#10;Description automatically generated">
-            <a:extLst>
-              <a:ext uri="{FF2B5EF4-FFF2-40B4-BE49-F238E27FC236}">
-                <a16:creationId xmlns:a16="http://schemas.microsoft.com/office/drawing/2014/main" id="{17F55553-1E22-F065-EA01-C3B0875EB3CE}"/>
-              </a:ext>
-            </a:extLst>
-          </p:cNvPr>
-          <p:cNvPicPr>
-            <a:picLocks noChangeAspect="1"/>
-          </p:cNvPicPr>
-          <p:nvPr/>
-        </p:nvPicPr>
-        <p:blipFill rotWithShape="1">
-          <a:blip r:embed="rId3"/>
-          <a:srcRect l="26328" t="25146" r="69844" b="58120"/>
-          <a:stretch/>
-        </p:blipFill>
-        <p:spPr>
-          <a:xfrm>
-            <a:off x="3119061" y="1726452"/>
-            <a:ext cx="483457" cy="1349251"/>
-          </a:xfrm>
-          <a:prstGeom prst="rect">
-            <a:avLst/>
-          </a:prstGeom>
-        </p:spPr>
-      </p:pic>
-      <p:pic>
-        <p:nvPicPr>
-          <p:cNvPr id="8" name="Picture 7" descr="A group of colorful arrows&#10;&#10;Description automatically generated">
-            <a:extLst>
-              <a:ext uri="{FF2B5EF4-FFF2-40B4-BE49-F238E27FC236}">
-                <a16:creationId xmlns:a16="http://schemas.microsoft.com/office/drawing/2014/main" id="{8D7BE5D4-3C61-063D-5118-CA6FDCDAC20E}"/>
-              </a:ext>
-            </a:extLst>
-          </p:cNvPr>
-          <p:cNvPicPr>
-            <a:picLocks noChangeAspect="1"/>
-          </p:cNvPicPr>
-          <p:nvPr/>
-        </p:nvPicPr>
-        <p:blipFill rotWithShape="1">
-          <a:blip r:embed="rId3"/>
-          <a:srcRect l="45103" t="25146" r="51069" b="58120"/>
-          <a:stretch/>
-        </p:blipFill>
-        <p:spPr>
-          <a:xfrm>
-            <a:off x="5749810" y="1726452"/>
-            <a:ext cx="483457" cy="1349251"/>
-          </a:xfrm>
-          <a:prstGeom prst="rect">
-            <a:avLst/>
-          </a:prstGeom>
-        </p:spPr>
-      </p:pic>
-      <p:pic>
-        <p:nvPicPr>
-          <p:cNvPr id="9" name="Picture 8" descr="A group of colorful arrows&#10;&#10;Description automatically generated">
-            <a:extLst>
-              <a:ext uri="{FF2B5EF4-FFF2-40B4-BE49-F238E27FC236}">
-                <a16:creationId xmlns:a16="http://schemas.microsoft.com/office/drawing/2014/main" id="{D04B5644-7ACD-7E56-34CA-1D5DB4AB1792}"/>
-              </a:ext>
-            </a:extLst>
-          </p:cNvPr>
-          <p:cNvPicPr>
-            <a:picLocks noChangeAspect="1"/>
-          </p:cNvPicPr>
-          <p:nvPr/>
-        </p:nvPicPr>
-        <p:blipFill rotWithShape="1">
-          <a:blip r:embed="rId3"/>
-          <a:srcRect l="69023" t="25146" r="26160" b="58120"/>
-          <a:stretch/>
-        </p:blipFill>
-        <p:spPr>
-          <a:xfrm>
-            <a:off x="8930495" y="1731777"/>
-            <a:ext cx="575075" cy="1338600"/>
-          </a:xfrm>
-          <a:prstGeom prst="rect">
-            <a:avLst/>
-          </a:prstGeom>
-        </p:spPr>
-      </p:pic>
-      <p:sp>
-        <p:nvSpPr>
-          <p:cNvPr id="10" name="TextBox 9">
-            <a:extLst>
-              <a:ext uri="{FF2B5EF4-FFF2-40B4-BE49-F238E27FC236}">
-                <a16:creationId xmlns:a16="http://schemas.microsoft.com/office/drawing/2014/main" id="{F4E10B34-0079-DA20-DA10-48C3AA4BE8DA}"/>
-              </a:ext>
-            </a:extLst>
-          </p:cNvPr>
-          <p:cNvSpPr txBox="1"/>
-          <p:nvPr/>
-        </p:nvSpPr>
-        <p:spPr>
-          <a:xfrm>
-            <a:off x="600188" y="1171547"/>
-            <a:ext cx="2931765" cy="369332"/>
-          </a:xfrm>
-          <a:prstGeom prst="rect">
-            <a:avLst/>
-          </a:prstGeom>
-          <a:noFill/>
-        </p:spPr>
-        <p:txBody>
-          <a:bodyPr wrap="none" rtlCol="0">
-            <a:spAutoFit/>
-          </a:bodyPr>
-          <a:lstStyle/>
-          <a:p>
-            <a:r>
-              <a:rPr lang="en-US" b="1" dirty="0" err="1"/>
-              <a:t>Tailocin</a:t>
-            </a:r>
-            <a:r>
-              <a:rPr lang="en-US" b="1" dirty="0"/>
-              <a:t> tail fiber haplotypes </a:t>
-            </a:r>
-          </a:p>
-        </p:txBody>
-      </p:sp>
-      <p:sp>
-        <p:nvSpPr>
-          <p:cNvPr id="11" name="TextBox 10">
-            <a:extLst>
-              <a:ext uri="{FF2B5EF4-FFF2-40B4-BE49-F238E27FC236}">
-                <a16:creationId xmlns:a16="http://schemas.microsoft.com/office/drawing/2014/main" id="{825F79EB-D7C2-E6A9-7C1C-C86069F4C829}"/>
-              </a:ext>
-            </a:extLst>
-          </p:cNvPr>
-          <p:cNvSpPr txBox="1"/>
-          <p:nvPr/>
-        </p:nvSpPr>
-        <p:spPr>
-          <a:xfrm rot="16200000">
-            <a:off x="-1620159" y="2743088"/>
-            <a:ext cx="3656322" cy="369332"/>
-          </a:xfrm>
-          <a:prstGeom prst="rect">
-            <a:avLst/>
-          </a:prstGeom>
-          <a:noFill/>
-        </p:spPr>
-        <p:txBody>
-          <a:bodyPr wrap="none" rtlCol="0">
-            <a:spAutoFit/>
-          </a:bodyPr>
-          <a:lstStyle/>
-          <a:p>
-            <a:r>
-              <a:rPr lang="en-US" b="1" dirty="0"/>
-              <a:t>O-antigen biosynthesis cluster genes</a:t>
-            </a:r>
-          </a:p>
-        </p:txBody>
-      </p:sp>
-      <p:pic>
-        <p:nvPicPr>
-          <p:cNvPr id="16" name="Picture 15">
-            <a:extLst>
-              <a:ext uri="{FF2B5EF4-FFF2-40B4-BE49-F238E27FC236}">
-                <a16:creationId xmlns:a16="http://schemas.microsoft.com/office/drawing/2014/main" id="{70021C95-B209-0097-F8DF-F1D3E99B45B8}"/>
-              </a:ext>
-            </a:extLst>
-          </p:cNvPr>
-          <p:cNvPicPr>
-            <a:picLocks noChangeAspect="1"/>
-          </p:cNvPicPr>
-          <p:nvPr/>
-        </p:nvPicPr>
-        <p:blipFill rotWithShape="1">
-          <a:blip r:embed="rId4"/>
           <a:srcRect l="81222" t="61175" r="17905" b="28891"/>
           <a:stretch/>
         </p:blipFill>
@@ -4206,7 +4104,7 @@
               <p:nvPr/>
             </p:nvPicPr>
             <p:blipFill rotWithShape="1">
-              <a:blip r:embed="rId3"/>
+              <a:blip r:embed="rId4"/>
               <a:srcRect l="82951" t="39385" r="15576" b="58324"/>
               <a:stretch/>
             </p:blipFill>
@@ -4235,7 +4133,7 @@
               <p:nvPr/>
             </p:nvPicPr>
             <p:blipFill rotWithShape="1">
-              <a:blip r:embed="rId3"/>
+              <a:blip r:embed="rId4"/>
               <a:srcRect l="82646" t="25687" r="15318" b="67298"/>
               <a:stretch/>
             </p:blipFill>
@@ -4280,6 +4178,11 @@
             <a:p>
               <a:r>
                 <a:rPr lang="en-US" sz="1200" dirty="0">
+                  <a:ln w="3175">
+                    <a:solidFill>
+                      <a:srgbClr val="D0B7D8"/>
+                    </a:solidFill>
+                  </a:ln>
                   <a:solidFill>
                     <a:srgbClr val="F7D7FE"/>
                   </a:solidFill>
@@ -4290,6 +4193,11 @@
             <a:p>
               <a:r>
                 <a:rPr lang="en-US" sz="1200" dirty="0">
+                  <a:ln w="3175">
+                    <a:solidFill>
+                      <a:schemeClr val="accent1"/>
+                    </a:solidFill>
+                  </a:ln>
                   <a:solidFill>
                     <a:srgbClr val="638CCD"/>
                   </a:solidFill>
@@ -4300,6 +4208,11 @@
             <a:p>
               <a:r>
                 <a:rPr lang="en-US" sz="1200" dirty="0">
+                  <a:ln w="3175">
+                    <a:solidFill>
+                      <a:srgbClr val="801033"/>
+                    </a:solidFill>
+                  </a:ln>
                   <a:solidFill>
                     <a:srgbClr val="801033"/>
                   </a:solidFill>
@@ -4310,6 +4223,11 @@
             <a:p>
               <a:r>
                 <a:rPr lang="en-US" sz="1200" dirty="0">
+                  <a:ln w="3175">
+                    <a:solidFill>
+                      <a:srgbClr val="FAD42A"/>
+                    </a:solidFill>
+                  </a:ln>
                   <a:solidFill>
                     <a:srgbClr val="FAD42A"/>
                   </a:solidFill>
@@ -4444,7 +4362,7 @@
           <p:nvPr/>
         </p:nvPicPr>
         <p:blipFill rotWithShape="1">
-          <a:blip r:embed="rId3"/>
+          <a:blip r:embed="rId4"/>
           <a:srcRect l="93502" t="51099" r="2534" b="43959"/>
           <a:stretch/>
         </p:blipFill>
@@ -4580,6 +4498,122 @@
           <a:xfrm>
             <a:off x="369478" y="3114598"/>
             <a:ext cx="10227530" cy="1349251"/>
+          </a:xfrm>
+          <a:prstGeom prst="rect">
+            <a:avLst/>
+          </a:prstGeom>
+        </p:spPr>
+      </p:pic>
+      <p:pic>
+        <p:nvPicPr>
+          <p:cNvPr id="27" name="Picture 26" descr="A group of colorful objects&#10;&#10;Description automatically generated">
+            <a:extLst>
+              <a:ext uri="{FF2B5EF4-FFF2-40B4-BE49-F238E27FC236}">
+                <a16:creationId xmlns:a16="http://schemas.microsoft.com/office/drawing/2014/main" id="{8984256A-E2DB-0B30-4FA0-EC8BAFC87397}"/>
+              </a:ext>
+            </a:extLst>
+          </p:cNvPr>
+          <p:cNvPicPr>
+            <a:picLocks noChangeAspect="1"/>
+          </p:cNvPicPr>
+          <p:nvPr/>
+        </p:nvPicPr>
+        <p:blipFill rotWithShape="1">
+          <a:blip r:embed="rId8"/>
+          <a:srcRect l="76182" b="12342"/>
+          <a:stretch/>
+        </p:blipFill>
+        <p:spPr>
+          <a:xfrm>
+            <a:off x="1281816" y="1726452"/>
+            <a:ext cx="501497" cy="1291974"/>
+          </a:xfrm>
+          <a:prstGeom prst="rect">
+            <a:avLst/>
+          </a:prstGeom>
+        </p:spPr>
+      </p:pic>
+      <p:pic>
+        <p:nvPicPr>
+          <p:cNvPr id="29" name="Picture 28" descr="A group of colorful objects&#10;&#10;Description automatically generated">
+            <a:extLst>
+              <a:ext uri="{FF2B5EF4-FFF2-40B4-BE49-F238E27FC236}">
+                <a16:creationId xmlns:a16="http://schemas.microsoft.com/office/drawing/2014/main" id="{D7BFB14C-B454-B9BF-9E2C-CB3AAE7C98F0}"/>
+              </a:ext>
+            </a:extLst>
+          </p:cNvPr>
+          <p:cNvPicPr>
+            <a:picLocks noChangeAspect="1"/>
+          </p:cNvPicPr>
+          <p:nvPr/>
+        </p:nvPicPr>
+        <p:blipFill rotWithShape="1">
+          <a:blip r:embed="rId8"/>
+          <a:srcRect l="26011" r="51028" b="12342"/>
+          <a:stretch/>
+        </p:blipFill>
+        <p:spPr>
+          <a:xfrm>
+            <a:off x="3052582" y="1726452"/>
+            <a:ext cx="483457" cy="1291974"/>
+          </a:xfrm>
+          <a:prstGeom prst="rect">
+            <a:avLst/>
+          </a:prstGeom>
+        </p:spPr>
+      </p:pic>
+      <p:pic>
+        <p:nvPicPr>
+          <p:cNvPr id="32" name="Picture 31" descr="A group of colorful objects&#10;&#10;Description automatically generated">
+            <a:extLst>
+              <a:ext uri="{FF2B5EF4-FFF2-40B4-BE49-F238E27FC236}">
+                <a16:creationId xmlns:a16="http://schemas.microsoft.com/office/drawing/2014/main" id="{B3818528-4738-95AB-66E7-52528D73E536}"/>
+              </a:ext>
+            </a:extLst>
+          </p:cNvPr>
+          <p:cNvPicPr>
+            <a:picLocks noChangeAspect="1"/>
+          </p:cNvPicPr>
+          <p:nvPr/>
+        </p:nvPicPr>
+        <p:blipFill rotWithShape="1">
+          <a:blip r:embed="rId8"/>
+          <a:srcRect l="2904" t="1041" r="74135" b="11302"/>
+          <a:stretch/>
+        </p:blipFill>
+        <p:spPr>
+          <a:xfrm>
+            <a:off x="8838271" y="1743972"/>
+            <a:ext cx="483457" cy="1291974"/>
+          </a:xfrm>
+          <a:prstGeom prst="rect">
+            <a:avLst/>
+          </a:prstGeom>
+        </p:spPr>
+      </p:pic>
+      <p:pic>
+        <p:nvPicPr>
+          <p:cNvPr id="36" name="Picture 35" descr="A group of colorful objects&#10;&#10;Description automatically generated">
+            <a:extLst>
+              <a:ext uri="{FF2B5EF4-FFF2-40B4-BE49-F238E27FC236}">
+                <a16:creationId xmlns:a16="http://schemas.microsoft.com/office/drawing/2014/main" id="{2FF49F03-A5E6-677E-BB4C-263ACC40DCEA}"/>
+              </a:ext>
+            </a:extLst>
+          </p:cNvPr>
+          <p:cNvPicPr>
+            <a:picLocks noChangeAspect="1"/>
+          </p:cNvPicPr>
+          <p:nvPr/>
+        </p:nvPicPr>
+        <p:blipFill rotWithShape="1">
+          <a:blip r:embed="rId9"/>
+          <a:srcRect l="56659" r="30180" b="12500"/>
+          <a:stretch/>
+        </p:blipFill>
+        <p:spPr>
+          <a:xfrm>
+            <a:off x="5818999" y="1726452"/>
+            <a:ext cx="277001" cy="1289088"/>
           </a:xfrm>
           <a:prstGeom prst="rect">
             <a:avLst/>
